--- a/Swiggy-DPDP-Final-PM-Case.pptx
+++ b/Swiggy-DPDP-Final-PM-Case.pptx
@@ -4550,7 +4550,7 @@
         <p:spPr>
           <a:xfrm>
             <a:off x="502920" y="3959352"/>
-            <a:ext cx="6400800" cy="1005840"/>
+            <a:ext cx="6400800" cy="731520"/>
           </a:xfrm>
           <a:prstGeom prst="rect">
             <a:avLst/>
@@ -4594,20 +4594,20 @@
         </p:nvSpPr>
         <p:spPr>
           <a:xfrm>
-            <a:off x="502920" y="5806440"/>
-            <a:ext cx="6400800" cy="566928"/>
+            <a:off x="502920" y="4672584"/>
+            <a:ext cx="3017520" cy="329184"/>
           </a:xfrm>
           <a:prstGeom prst="roundRect">
             <a:avLst>
-              <a:gd name="adj" fmla="val 8000"/>
+              <a:gd name="adj" fmla="val 12000"/>
             </a:avLst>
           </a:prstGeom>
           <a:solidFill>
-            <a:srgbClr val="FFF4EA"/>
+            <a:srgbClr val="FAFAFA"/>
           </a:solidFill>
-          <a:ln w="15240">
+          <a:ln w="12700">
             <a:solidFill>
-              <a:srgbClr val="FC8019"/>
+              <a:srgbClr val="E4E4E7"/>
             </a:solidFill>
           </a:ln>
           <a:effectLst/>
@@ -4636,14 +4636,58 @@
       </p:sp>
       <p:sp>
         <p:nvSpPr>
-          <p:cNvPr id="13" name="TextBox 12"/>
+          <p:cNvPr id="13" name="Rectangle 12"/>
+          <p:cNvSpPr/>
+          <p:nvPr/>
+        </p:nvSpPr>
+        <p:spPr>
+          <a:xfrm>
+            <a:off x="502920" y="4727448"/>
+            <a:ext cx="45720" cy="219456"/>
+          </a:xfrm>
+          <a:prstGeom prst="rect">
+            <a:avLst/>
+          </a:prstGeom>
+          <a:solidFill>
+            <a:srgbClr val="FC8019"/>
+          </a:solidFill>
+          <a:ln>
+            <a:noFill/>
+          </a:ln>
+          <a:effectLst/>
+        </p:spPr>
+        <p:style>
+          <a:lnRef idx="1">
+            <a:schemeClr val="accent1"/>
+          </a:lnRef>
+          <a:fillRef idx="3">
+            <a:schemeClr val="accent1"/>
+          </a:fillRef>
+          <a:effectRef idx="2">
+            <a:schemeClr val="accent1"/>
+          </a:effectRef>
+          <a:fontRef idx="minor">
+            <a:schemeClr val="lt1"/>
+          </a:fontRef>
+        </p:style>
+        <p:txBody>
+          <a:bodyPr rtlCol="0" anchor="ctr"/>
+          <a:lstStyle/>
+          <a:p>
+            <a:pPr algn="ctr"/>
+          </a:p>
+        </p:txBody>
+      </p:sp>
+      <p:sp>
+        <p:nvSpPr>
+          <p:cNvPr id="14" name="TextBox 13"/>
           <p:cNvSpPr txBox="1"/>
           <p:nvPr/>
         </p:nvSpPr>
         <p:spPr>
           <a:xfrm>
-            <a:off x="685800" y="5888736"/>
-            <a:ext cx="6035040" cy="457200"/>
+            <a:off x="649224" y="4700016"/>
+            <a:ext cx="2798063" cy="274320"/>
           </a:xfrm>
           <a:prstGeom prst="rect">
             <a:avLst/>
@@ -4670,34 +4714,117 @@
             <a:r>
               <a:rPr sz="1000" b="1" i="0">
                 <a:solidFill>
-                  <a:srgbClr val="E0670A"/>
-                </a:solidFill>
-                <a:latin typeface="Calibri"/>
-              </a:rPr>
-              <a:t>DECISION ASK   </a:t>
-            </a:r>
-            <a:r>
-              <a:rPr sz="1100" b="0" i="0">
-                <a:solidFill>
                   <a:srgbClr val="18181B"/>
                 </a:solidFill>
                 <a:latin typeface="Calibri"/>
               </a:rPr>
-              <a:t>Approve resourcing + Phase-1 A/B launch to make consent valid without breaking onboarding.</a:t>
-            </a:r>
-          </a:p>
-        </p:txBody>
-      </p:sp>
-      <p:sp>
-        <p:nvSpPr>
-          <p:cNvPr id="14" name="TextBox 13"/>
+              <a:t>1 Unbundled buckets</a:t>
+            </a:r>
+          </a:p>
+        </p:txBody>
+      </p:sp>
+      <p:sp>
+        <p:nvSpPr>
+          <p:cNvPr id="15" name="Rounded Rectangle 14"/>
+          <p:cNvSpPr/>
+          <p:nvPr/>
+        </p:nvSpPr>
+        <p:spPr>
+          <a:xfrm>
+            <a:off x="3703320" y="4672584"/>
+            <a:ext cx="3017520" cy="329184"/>
+          </a:xfrm>
+          <a:prstGeom prst="roundRect">
+            <a:avLst>
+              <a:gd name="adj" fmla="val 12000"/>
+            </a:avLst>
+          </a:prstGeom>
+          <a:solidFill>
+            <a:srgbClr val="FAFAFA"/>
+          </a:solidFill>
+          <a:ln w="12700">
+            <a:solidFill>
+              <a:srgbClr val="E4E4E7"/>
+            </a:solidFill>
+          </a:ln>
+          <a:effectLst/>
+        </p:spPr>
+        <p:style>
+          <a:lnRef idx="1">
+            <a:schemeClr val="accent1"/>
+          </a:lnRef>
+          <a:fillRef idx="3">
+            <a:schemeClr val="accent1"/>
+          </a:fillRef>
+          <a:effectRef idx="2">
+            <a:schemeClr val="accent1"/>
+          </a:effectRef>
+          <a:fontRef idx="minor">
+            <a:schemeClr val="lt1"/>
+          </a:fontRef>
+        </p:style>
+        <p:txBody>
+          <a:bodyPr rtlCol="0" anchor="ctr"/>
+          <a:lstStyle/>
+          <a:p>
+            <a:pPr algn="ctr"/>
+          </a:p>
+        </p:txBody>
+      </p:sp>
+      <p:sp>
+        <p:nvSpPr>
+          <p:cNvPr id="16" name="Rectangle 15"/>
+          <p:cNvSpPr/>
+          <p:nvPr/>
+        </p:nvSpPr>
+        <p:spPr>
+          <a:xfrm>
+            <a:off x="3703320" y="4727448"/>
+            <a:ext cx="45720" cy="219456"/>
+          </a:xfrm>
+          <a:prstGeom prst="rect">
+            <a:avLst/>
+          </a:prstGeom>
+          <a:solidFill>
+            <a:srgbClr val="FC8019"/>
+          </a:solidFill>
+          <a:ln>
+            <a:noFill/>
+          </a:ln>
+          <a:effectLst/>
+        </p:spPr>
+        <p:style>
+          <a:lnRef idx="1">
+            <a:schemeClr val="accent1"/>
+          </a:lnRef>
+          <a:fillRef idx="3">
+            <a:schemeClr val="accent1"/>
+          </a:fillRef>
+          <a:effectRef idx="2">
+            <a:schemeClr val="accent1"/>
+          </a:effectRef>
+          <a:fontRef idx="minor">
+            <a:schemeClr val="lt1"/>
+          </a:fontRef>
+        </p:style>
+        <p:txBody>
+          <a:bodyPr rtlCol="0" anchor="ctr"/>
+          <a:lstStyle/>
+          <a:p>
+            <a:pPr algn="ctr"/>
+          </a:p>
+        </p:txBody>
+      </p:sp>
+      <p:sp>
+        <p:nvSpPr>
+          <p:cNvPr id="17" name="TextBox 16"/>
           <p:cNvSpPr txBox="1"/>
           <p:nvPr/>
         </p:nvSpPr>
         <p:spPr>
           <a:xfrm>
-            <a:off x="7315200" y="2176272"/>
-            <a:ext cx="4373575" cy="274320"/>
+            <a:off x="3849624" y="4700016"/>
+            <a:ext cx="2798063" cy="274320"/>
           </a:xfrm>
           <a:prstGeom prst="rect">
             <a:avLst/>
@@ -4705,7 +4832,7 @@
           <a:noFill/>
         </p:spPr>
         <p:txBody>
-          <a:bodyPr wrap="square" anchor="t" lIns="0" rIns="0" tIns="0" bIns="0">
+          <a:bodyPr wrap="square" anchor="ctr" lIns="0" rIns="0" tIns="0" bIns="0">
             <a:spAutoFit/>
           </a:bodyPr>
           <a:lstStyle/>
@@ -4724,29 +4851,29 @@
             <a:r>
               <a:rPr sz="1000" b="1" i="0">
                 <a:solidFill>
-                  <a:srgbClr val="E0670A"/>
-                </a:solidFill>
-                <a:latin typeface="Calibri"/>
-              </a:rPr>
-              <a:t>EVIDENCE LEDGER</a:t>
-            </a:r>
-          </a:p>
-        </p:txBody>
-      </p:sp>
-      <p:sp>
-        <p:nvSpPr>
-          <p:cNvPr id="15" name="Rounded Rectangle 14"/>
+                  <a:srgbClr val="18181B"/>
+                </a:solidFill>
+                <a:latin typeface="Calibri"/>
+              </a:rPr>
+              <a:t>2 Just-in-time notices</a:t>
+            </a:r>
+          </a:p>
+        </p:txBody>
+      </p:sp>
+      <p:sp>
+        <p:nvSpPr>
+          <p:cNvPr id="18" name="Rounded Rectangle 17"/>
           <p:cNvSpPr/>
           <p:nvPr/>
         </p:nvSpPr>
         <p:spPr>
           <a:xfrm>
-            <a:off x="7315200" y="2496312"/>
-            <a:ext cx="4373575" cy="841248"/>
+            <a:off x="502920" y="5074920"/>
+            <a:ext cx="3017520" cy="329184"/>
           </a:xfrm>
           <a:prstGeom prst="roundRect">
             <a:avLst>
-              <a:gd name="adj" fmla="val 8000"/>
+              <a:gd name="adj" fmla="val 12000"/>
             </a:avLst>
           </a:prstGeom>
           <a:solidFill>
@@ -4783,14 +4910,14 @@
       </p:sp>
       <p:sp>
         <p:nvSpPr>
-          <p:cNvPr id="16" name="Rectangle 15"/>
+          <p:cNvPr id="19" name="Rectangle 18"/>
           <p:cNvSpPr/>
           <p:nvPr/>
         </p:nvSpPr>
         <p:spPr>
           <a:xfrm>
-            <a:off x="7315200" y="2606040"/>
-            <a:ext cx="54864" cy="621792"/>
+            <a:off x="502920" y="5129784"/>
+            <a:ext cx="45720" cy="219456"/>
           </a:xfrm>
           <a:prstGeom prst="rect">
             <a:avLst/>
@@ -4827,14 +4954,14 @@
       </p:sp>
       <p:sp>
         <p:nvSpPr>
-          <p:cNvPr id="17" name="TextBox 16"/>
+          <p:cNvPr id="20" name="TextBox 19"/>
           <p:cNvSpPr txBox="1"/>
           <p:nvPr/>
         </p:nvSpPr>
         <p:spPr>
           <a:xfrm>
-            <a:off x="7516368" y="2615184"/>
-            <a:ext cx="4007815" cy="365760"/>
+            <a:off x="649224" y="5102352"/>
+            <a:ext cx="2798063" cy="274320"/>
           </a:xfrm>
           <a:prstGeom prst="rect">
             <a:avLst/>
@@ -4842,7 +4969,7 @@
           <a:noFill/>
         </p:spPr>
         <p:txBody>
-          <a:bodyPr wrap="square" anchor="t" lIns="0" rIns="0" tIns="0" bIns="0">
+          <a:bodyPr wrap="square" anchor="ctr" lIns="0" rIns="0" tIns="0" bIns="0">
             <a:spAutoFit/>
           </a:bodyPr>
           <a:lstStyle/>
@@ -4859,27 +4986,119 @@
               </a:spcAft>
             </a:pPr>
             <a:r>
-              <a:rPr sz="1700" b="1" i="0">
+              <a:rPr sz="1000" b="1" i="0">
                 <a:solidFill>
                   <a:srgbClr val="18181B"/>
                 </a:solidFill>
                 <a:latin typeface="Calibri"/>
               </a:rPr>
-              <a:t>~24M+</a:t>
-            </a:r>
-          </a:p>
-        </p:txBody>
-      </p:sp>
-      <p:sp>
-        <p:nvSpPr>
-          <p:cNvPr id="18" name="TextBox 17"/>
+              <a:t>3 Multilingual</a:t>
+            </a:r>
+          </a:p>
+        </p:txBody>
+      </p:sp>
+      <p:sp>
+        <p:nvSpPr>
+          <p:cNvPr id="21" name="Rounded Rectangle 20"/>
+          <p:cNvSpPr/>
+          <p:nvPr/>
+        </p:nvSpPr>
+        <p:spPr>
+          <a:xfrm>
+            <a:off x="3703320" y="5074920"/>
+            <a:ext cx="3017520" cy="329184"/>
+          </a:xfrm>
+          <a:prstGeom prst="roundRect">
+            <a:avLst>
+              <a:gd name="adj" fmla="val 12000"/>
+            </a:avLst>
+          </a:prstGeom>
+          <a:solidFill>
+            <a:srgbClr val="FAFAFA"/>
+          </a:solidFill>
+          <a:ln w="12700">
+            <a:solidFill>
+              <a:srgbClr val="E4E4E7"/>
+            </a:solidFill>
+          </a:ln>
+          <a:effectLst/>
+        </p:spPr>
+        <p:style>
+          <a:lnRef idx="1">
+            <a:schemeClr val="accent1"/>
+          </a:lnRef>
+          <a:fillRef idx="3">
+            <a:schemeClr val="accent1"/>
+          </a:fillRef>
+          <a:effectRef idx="2">
+            <a:schemeClr val="accent1"/>
+          </a:effectRef>
+          <a:fontRef idx="minor">
+            <a:schemeClr val="lt1"/>
+          </a:fontRef>
+        </p:style>
+        <p:txBody>
+          <a:bodyPr rtlCol="0" anchor="ctr"/>
+          <a:lstStyle/>
+          <a:p>
+            <a:pPr algn="ctr"/>
+          </a:p>
+        </p:txBody>
+      </p:sp>
+      <p:sp>
+        <p:nvSpPr>
+          <p:cNvPr id="22" name="Rectangle 21"/>
+          <p:cNvSpPr/>
+          <p:nvPr/>
+        </p:nvSpPr>
+        <p:spPr>
+          <a:xfrm>
+            <a:off x="3703320" y="5129784"/>
+            <a:ext cx="45720" cy="219456"/>
+          </a:xfrm>
+          <a:prstGeom prst="rect">
+            <a:avLst/>
+          </a:prstGeom>
+          <a:solidFill>
+            <a:srgbClr val="FC8019"/>
+          </a:solidFill>
+          <a:ln>
+            <a:noFill/>
+          </a:ln>
+          <a:effectLst/>
+        </p:spPr>
+        <p:style>
+          <a:lnRef idx="1">
+            <a:schemeClr val="accent1"/>
+          </a:lnRef>
+          <a:fillRef idx="3">
+            <a:schemeClr val="accent1"/>
+          </a:fillRef>
+          <a:effectRef idx="2">
+            <a:schemeClr val="accent1"/>
+          </a:effectRef>
+          <a:fontRef idx="minor">
+            <a:schemeClr val="lt1"/>
+          </a:fontRef>
+        </p:style>
+        <p:txBody>
+          <a:bodyPr rtlCol="0" anchor="ctr"/>
+          <a:lstStyle/>
+          <a:p>
+            <a:pPr algn="ctr"/>
+          </a:p>
+        </p:txBody>
+      </p:sp>
+      <p:sp>
+        <p:nvSpPr>
+          <p:cNvPr id="23" name="TextBox 22"/>
           <p:cNvSpPr txBox="1"/>
           <p:nvPr/>
         </p:nvSpPr>
         <p:spPr>
           <a:xfrm>
-            <a:off x="7516368" y="2999232"/>
-            <a:ext cx="4007815" cy="274320"/>
+            <a:off x="3849624" y="5102352"/>
+            <a:ext cx="2798063" cy="274320"/>
           </a:xfrm>
           <a:prstGeom prst="rect">
             <a:avLst/>
@@ -4887,7 +5106,7 @@
           <a:noFill/>
         </p:spPr>
         <p:txBody>
-          <a:bodyPr wrap="square" anchor="t" lIns="0" rIns="0" tIns="0" bIns="0">
+          <a:bodyPr wrap="square" anchor="ctr" lIns="0" rIns="0" tIns="0" bIns="0">
             <a:spAutoFit/>
           </a:bodyPr>
           <a:lstStyle/>
@@ -4904,31 +5123,31 @@
               </a:spcAft>
             </a:pPr>
             <a:r>
-              <a:rPr sz="1000" b="0" i="0">
-                <a:solidFill>
-                  <a:srgbClr val="52525B"/>
-                </a:solidFill>
-                <a:latin typeface="Calibri"/>
-              </a:rPr>
-              <a:t>Monthly active users</a:t>
-            </a:r>
-          </a:p>
-        </p:txBody>
-      </p:sp>
-      <p:sp>
-        <p:nvSpPr>
-          <p:cNvPr id="19" name="Rounded Rectangle 18"/>
+              <a:rPr sz="1000" b="1" i="0">
+                <a:solidFill>
+                  <a:srgbClr val="18181B"/>
+                </a:solidFill>
+                <a:latin typeface="Calibri"/>
+              </a:rPr>
+              <a:t>4 Consent Ledger</a:t>
+            </a:r>
+          </a:p>
+        </p:txBody>
+      </p:sp>
+      <p:sp>
+        <p:nvSpPr>
+          <p:cNvPr id="24" name="Rounded Rectangle 23"/>
           <p:cNvSpPr/>
           <p:nvPr/>
         </p:nvSpPr>
         <p:spPr>
           <a:xfrm>
-            <a:off x="7315200" y="3465576"/>
-            <a:ext cx="4373575" cy="841248"/>
+            <a:off x="502920" y="5477256"/>
+            <a:ext cx="6400800" cy="329184"/>
           </a:xfrm>
           <a:prstGeom prst="roundRect">
             <a:avLst>
-              <a:gd name="adj" fmla="val 8000"/>
+              <a:gd name="adj" fmla="val 12000"/>
             </a:avLst>
           </a:prstGeom>
           <a:solidFill>
@@ -4965,20 +5184,20 @@
       </p:sp>
       <p:sp>
         <p:nvSpPr>
-          <p:cNvPr id="20" name="Rectangle 19"/>
+          <p:cNvPr id="25" name="Rectangle 24"/>
           <p:cNvSpPr/>
           <p:nvPr/>
         </p:nvSpPr>
         <p:spPr>
           <a:xfrm>
-            <a:off x="7315200" y="3575304"/>
-            <a:ext cx="54864" cy="621792"/>
+            <a:off x="502920" y="5532120"/>
+            <a:ext cx="45720" cy="219456"/>
           </a:xfrm>
           <a:prstGeom prst="rect">
             <a:avLst/>
           </a:prstGeom>
           <a:solidFill>
-            <a:srgbClr val="FC8019"/>
+            <a:srgbClr val="1BA672"/>
           </a:solidFill>
           <a:ln>
             <a:noFill/>
@@ -5009,14 +5228,14 @@
       </p:sp>
       <p:sp>
         <p:nvSpPr>
-          <p:cNvPr id="21" name="TextBox 20"/>
+          <p:cNvPr id="26" name="TextBox 25"/>
           <p:cNvSpPr txBox="1"/>
           <p:nvPr/>
         </p:nvSpPr>
         <p:spPr>
           <a:xfrm>
-            <a:off x="7516368" y="3584448"/>
-            <a:ext cx="4007815" cy="365760"/>
+            <a:off x="649224" y="5504688"/>
+            <a:ext cx="6181344" cy="274320"/>
           </a:xfrm>
           <a:prstGeom prst="rect">
             <a:avLst/>
@@ -5024,7 +5243,7 @@
           <a:noFill/>
         </p:spPr>
         <p:txBody>
-          <a:bodyPr wrap="square" anchor="t" lIns="0" rIns="0" tIns="0" bIns="0">
+          <a:bodyPr wrap="square" anchor="ctr" lIns="0" rIns="0" tIns="0" bIns="0">
             <a:spAutoFit/>
           </a:bodyPr>
           <a:lstStyle/>
@@ -5041,27 +5260,75 @@
               </a:spcAft>
             </a:pPr>
             <a:r>
-              <a:rPr sz="1700" b="1" i="0">
+              <a:rPr sz="1000" b="1" i="0">
                 <a:solidFill>
                   <a:srgbClr val="18181B"/>
                 </a:solidFill>
                 <a:latin typeface="Calibri"/>
               </a:rPr>
-              <a:t>₹250 cr</a:t>
-            </a:r>
-          </a:p>
-        </p:txBody>
-      </p:sp>
-      <p:sp>
-        <p:nvSpPr>
-          <p:cNvPr id="22" name="TextBox 21"/>
+              <a:t>5 Kids gateway</a:t>
+            </a:r>
+          </a:p>
+        </p:txBody>
+      </p:sp>
+      <p:sp>
+        <p:nvSpPr>
+          <p:cNvPr id="27" name="Rounded Rectangle 26"/>
+          <p:cNvSpPr/>
+          <p:nvPr/>
+        </p:nvSpPr>
+        <p:spPr>
+          <a:xfrm>
+            <a:off x="502920" y="5806440"/>
+            <a:ext cx="6400800" cy="566928"/>
+          </a:xfrm>
+          <a:prstGeom prst="roundRect">
+            <a:avLst>
+              <a:gd name="adj" fmla="val 8000"/>
+            </a:avLst>
+          </a:prstGeom>
+          <a:solidFill>
+            <a:srgbClr val="FFF4EA"/>
+          </a:solidFill>
+          <a:ln w="15240">
+            <a:solidFill>
+              <a:srgbClr val="FC8019"/>
+            </a:solidFill>
+          </a:ln>
+          <a:effectLst/>
+        </p:spPr>
+        <p:style>
+          <a:lnRef idx="1">
+            <a:schemeClr val="accent1"/>
+          </a:lnRef>
+          <a:fillRef idx="3">
+            <a:schemeClr val="accent1"/>
+          </a:fillRef>
+          <a:effectRef idx="2">
+            <a:schemeClr val="accent1"/>
+          </a:effectRef>
+          <a:fontRef idx="minor">
+            <a:schemeClr val="lt1"/>
+          </a:fontRef>
+        </p:style>
+        <p:txBody>
+          <a:bodyPr rtlCol="0" anchor="ctr"/>
+          <a:lstStyle/>
+          <a:p>
+            <a:pPr algn="ctr"/>
+          </a:p>
+        </p:txBody>
+      </p:sp>
+      <p:sp>
+        <p:nvSpPr>
+          <p:cNvPr id="28" name="TextBox 27"/>
           <p:cNvSpPr txBox="1"/>
           <p:nvPr/>
         </p:nvSpPr>
         <p:spPr>
           <a:xfrm>
-            <a:off x="7516368" y="3968496"/>
-            <a:ext cx="4007815" cy="274320"/>
+            <a:off x="685800" y="5888736"/>
+            <a:ext cx="6035040" cy="457200"/>
           </a:xfrm>
           <a:prstGeom prst="rect">
             <a:avLst/>
@@ -5069,7 +5336,7 @@
           <a:noFill/>
         </p:spPr>
         <p:txBody>
-          <a:bodyPr wrap="square" anchor="t" lIns="0" rIns="0" tIns="0" bIns="0">
+          <a:bodyPr wrap="square" anchor="ctr" lIns="0" rIns="0" tIns="0" bIns="0">
             <a:spAutoFit/>
           </a:bodyPr>
           <a:lstStyle/>
@@ -5086,119 +5353,36 @@
               </a:spcAft>
             </a:pPr>
             <a:r>
-              <a:rPr sz="1000" b="0" i="0">
-                <a:solidFill>
-                  <a:srgbClr val="52525B"/>
-                </a:solidFill>
-                <a:latin typeface="Calibri"/>
-              </a:rPr>
-              <a:t>Max DPDP penalty</a:t>
-            </a:r>
-          </a:p>
-        </p:txBody>
-      </p:sp>
-      <p:sp>
-        <p:nvSpPr>
-          <p:cNvPr id="23" name="Rounded Rectangle 22"/>
-          <p:cNvSpPr/>
-          <p:nvPr/>
-        </p:nvSpPr>
-        <p:spPr>
-          <a:xfrm>
-            <a:off x="7315200" y="4434840"/>
-            <a:ext cx="4373575" cy="841248"/>
-          </a:xfrm>
-          <a:prstGeom prst="roundRect">
-            <a:avLst>
-              <a:gd name="adj" fmla="val 8000"/>
-            </a:avLst>
-          </a:prstGeom>
-          <a:solidFill>
-            <a:srgbClr val="FAFAFA"/>
-          </a:solidFill>
-          <a:ln w="12700">
-            <a:solidFill>
-              <a:srgbClr val="E4E4E7"/>
-            </a:solidFill>
-          </a:ln>
-          <a:effectLst/>
-        </p:spPr>
-        <p:style>
-          <a:lnRef idx="1">
-            <a:schemeClr val="accent1"/>
-          </a:lnRef>
-          <a:fillRef idx="3">
-            <a:schemeClr val="accent1"/>
-          </a:fillRef>
-          <a:effectRef idx="2">
-            <a:schemeClr val="accent1"/>
-          </a:effectRef>
-          <a:fontRef idx="minor">
-            <a:schemeClr val="lt1"/>
-          </a:fontRef>
-        </p:style>
-        <p:txBody>
-          <a:bodyPr rtlCol="0" anchor="ctr"/>
-          <a:lstStyle/>
-          <a:p>
-            <a:pPr algn="ctr"/>
-          </a:p>
-        </p:txBody>
-      </p:sp>
-      <p:sp>
-        <p:nvSpPr>
-          <p:cNvPr id="24" name="Rectangle 23"/>
-          <p:cNvSpPr/>
-          <p:nvPr/>
-        </p:nvSpPr>
-        <p:spPr>
-          <a:xfrm>
-            <a:off x="7315200" y="4544568"/>
-            <a:ext cx="54864" cy="621792"/>
-          </a:xfrm>
-          <a:prstGeom prst="rect">
-            <a:avLst/>
-          </a:prstGeom>
-          <a:solidFill>
-            <a:srgbClr val="FC8019"/>
-          </a:solidFill>
-          <a:ln>
-            <a:noFill/>
-          </a:ln>
-          <a:effectLst/>
-        </p:spPr>
-        <p:style>
-          <a:lnRef idx="1">
-            <a:schemeClr val="accent1"/>
-          </a:lnRef>
-          <a:fillRef idx="3">
-            <a:schemeClr val="accent1"/>
-          </a:fillRef>
-          <a:effectRef idx="2">
-            <a:schemeClr val="accent1"/>
-          </a:effectRef>
-          <a:fontRef idx="minor">
-            <a:schemeClr val="lt1"/>
-          </a:fontRef>
-        </p:style>
-        <p:txBody>
-          <a:bodyPr rtlCol="0" anchor="ctr"/>
-          <a:lstStyle/>
-          <a:p>
-            <a:pPr algn="ctr"/>
-          </a:p>
-        </p:txBody>
-      </p:sp>
-      <p:sp>
-        <p:nvSpPr>
-          <p:cNvPr id="25" name="TextBox 24"/>
+              <a:rPr sz="1000" b="1" i="0">
+                <a:solidFill>
+                  <a:srgbClr val="E0670A"/>
+                </a:solidFill>
+                <a:latin typeface="Calibri"/>
+              </a:rPr>
+              <a:t>DECISION ASK   </a:t>
+            </a:r>
+            <a:r>
+              <a:rPr sz="1100" b="0" i="0">
+                <a:solidFill>
+                  <a:srgbClr val="18181B"/>
+                </a:solidFill>
+                <a:latin typeface="Calibri"/>
+              </a:rPr>
+              <a:t>Approve resourcing + Phase-1 A/B launch to make consent valid without breaking onboarding.</a:t>
+            </a:r>
+          </a:p>
+        </p:txBody>
+      </p:sp>
+      <p:sp>
+        <p:nvSpPr>
+          <p:cNvPr id="29" name="TextBox 28"/>
           <p:cNvSpPr txBox="1"/>
           <p:nvPr/>
         </p:nvSpPr>
         <p:spPr>
           <a:xfrm>
-            <a:off x="7516368" y="4553712"/>
-            <a:ext cx="4007815" cy="365760"/>
+            <a:off x="7315200" y="2176272"/>
+            <a:ext cx="4373575" cy="274320"/>
           </a:xfrm>
           <a:prstGeom prst="rect">
             <a:avLst/>
@@ -5223,27 +5407,119 @@
               </a:spcAft>
             </a:pPr>
             <a:r>
-              <a:rPr sz="1700" b="1" i="0">
-                <a:solidFill>
-                  <a:srgbClr val="18181B"/>
-                </a:solidFill>
-                <a:latin typeface="Calibri"/>
-              </a:rPr>
-              <a:t>~68% of digital natives</a:t>
-            </a:r>
-          </a:p>
-        </p:txBody>
-      </p:sp>
-      <p:sp>
-        <p:nvSpPr>
-          <p:cNvPr id="26" name="TextBox 25"/>
+              <a:rPr sz="1000" b="1" i="0">
+                <a:solidFill>
+                  <a:srgbClr val="E0670A"/>
+                </a:solidFill>
+                <a:latin typeface="Calibri"/>
+              </a:rPr>
+              <a:t>EVIDENCE LEDGER</a:t>
+            </a:r>
+          </a:p>
+        </p:txBody>
+      </p:sp>
+      <p:sp>
+        <p:nvSpPr>
+          <p:cNvPr id="30" name="Rounded Rectangle 29"/>
+          <p:cNvSpPr/>
+          <p:nvPr/>
+        </p:nvSpPr>
+        <p:spPr>
+          <a:xfrm>
+            <a:off x="7315200" y="2496312"/>
+            <a:ext cx="4373575" cy="841248"/>
+          </a:xfrm>
+          <a:prstGeom prst="roundRect">
+            <a:avLst>
+              <a:gd name="adj" fmla="val 8000"/>
+            </a:avLst>
+          </a:prstGeom>
+          <a:solidFill>
+            <a:srgbClr val="FAFAFA"/>
+          </a:solidFill>
+          <a:ln w="12700">
+            <a:solidFill>
+              <a:srgbClr val="E4E4E7"/>
+            </a:solidFill>
+          </a:ln>
+          <a:effectLst/>
+        </p:spPr>
+        <p:style>
+          <a:lnRef idx="1">
+            <a:schemeClr val="accent1"/>
+          </a:lnRef>
+          <a:fillRef idx="3">
+            <a:schemeClr val="accent1"/>
+          </a:fillRef>
+          <a:effectRef idx="2">
+            <a:schemeClr val="accent1"/>
+          </a:effectRef>
+          <a:fontRef idx="minor">
+            <a:schemeClr val="lt1"/>
+          </a:fontRef>
+        </p:style>
+        <p:txBody>
+          <a:bodyPr rtlCol="0" anchor="ctr"/>
+          <a:lstStyle/>
+          <a:p>
+            <a:pPr algn="ctr"/>
+          </a:p>
+        </p:txBody>
+      </p:sp>
+      <p:sp>
+        <p:nvSpPr>
+          <p:cNvPr id="31" name="Rectangle 30"/>
+          <p:cNvSpPr/>
+          <p:nvPr/>
+        </p:nvSpPr>
+        <p:spPr>
+          <a:xfrm>
+            <a:off x="7315200" y="2606040"/>
+            <a:ext cx="54864" cy="621792"/>
+          </a:xfrm>
+          <a:prstGeom prst="rect">
+            <a:avLst/>
+          </a:prstGeom>
+          <a:solidFill>
+            <a:srgbClr val="FC8019"/>
+          </a:solidFill>
+          <a:ln>
+            <a:noFill/>
+          </a:ln>
+          <a:effectLst/>
+        </p:spPr>
+        <p:style>
+          <a:lnRef idx="1">
+            <a:schemeClr val="accent1"/>
+          </a:lnRef>
+          <a:fillRef idx="3">
+            <a:schemeClr val="accent1"/>
+          </a:fillRef>
+          <a:effectRef idx="2">
+            <a:schemeClr val="accent1"/>
+          </a:effectRef>
+          <a:fontRef idx="minor">
+            <a:schemeClr val="lt1"/>
+          </a:fontRef>
+        </p:style>
+        <p:txBody>
+          <a:bodyPr rtlCol="0" anchor="ctr"/>
+          <a:lstStyle/>
+          <a:p>
+            <a:pPr algn="ctr"/>
+          </a:p>
+        </p:txBody>
+      </p:sp>
+      <p:sp>
+        <p:nvSpPr>
+          <p:cNvPr id="32" name="TextBox 31"/>
           <p:cNvSpPr txBox="1"/>
           <p:nvPr/>
         </p:nvSpPr>
         <p:spPr>
           <a:xfrm>
-            <a:off x="7516368" y="4937760"/>
-            <a:ext cx="4007815" cy="274320"/>
+            <a:off x="7516368" y="2615184"/>
+            <a:ext cx="4007815" cy="365760"/>
           </a:xfrm>
           <a:prstGeom prst="rect">
             <a:avLst/>
@@ -5268,119 +5544,27 @@
               </a:spcAft>
             </a:pPr>
             <a:r>
-              <a:rPr sz="1000" b="0" i="0">
-                <a:solidFill>
-                  <a:srgbClr val="52525B"/>
-                </a:solidFill>
-                <a:latin typeface="Calibri"/>
-              </a:rPr>
-              <a:t>Value data transparency</a:t>
-            </a:r>
-          </a:p>
-        </p:txBody>
-      </p:sp>
-      <p:sp>
-        <p:nvSpPr>
-          <p:cNvPr id="27" name="Rounded Rectangle 26"/>
-          <p:cNvSpPr/>
-          <p:nvPr/>
-        </p:nvSpPr>
-        <p:spPr>
-          <a:xfrm>
-            <a:off x="7315200" y="5404104"/>
-            <a:ext cx="4373575" cy="841248"/>
-          </a:xfrm>
-          <a:prstGeom prst="roundRect">
-            <a:avLst>
-              <a:gd name="adj" fmla="val 8000"/>
-            </a:avLst>
-          </a:prstGeom>
-          <a:solidFill>
-            <a:srgbClr val="FAFAFA"/>
-          </a:solidFill>
-          <a:ln w="12700">
-            <a:solidFill>
-              <a:srgbClr val="E4E4E7"/>
-            </a:solidFill>
-          </a:ln>
-          <a:effectLst/>
-        </p:spPr>
-        <p:style>
-          <a:lnRef idx="1">
-            <a:schemeClr val="accent1"/>
-          </a:lnRef>
-          <a:fillRef idx="3">
-            <a:schemeClr val="accent1"/>
-          </a:fillRef>
-          <a:effectRef idx="2">
-            <a:schemeClr val="accent1"/>
-          </a:effectRef>
-          <a:fontRef idx="minor">
-            <a:schemeClr val="lt1"/>
-          </a:fontRef>
-        </p:style>
-        <p:txBody>
-          <a:bodyPr rtlCol="0" anchor="ctr"/>
-          <a:lstStyle/>
-          <a:p>
-            <a:pPr algn="ctr"/>
-          </a:p>
-        </p:txBody>
-      </p:sp>
-      <p:sp>
-        <p:nvSpPr>
-          <p:cNvPr id="28" name="Rectangle 27"/>
-          <p:cNvSpPr/>
-          <p:nvPr/>
-        </p:nvSpPr>
-        <p:spPr>
-          <a:xfrm>
-            <a:off x="7315200" y="5513832"/>
-            <a:ext cx="54864" cy="621792"/>
-          </a:xfrm>
-          <a:prstGeom prst="rect">
-            <a:avLst/>
-          </a:prstGeom>
-          <a:solidFill>
-            <a:srgbClr val="FC8019"/>
-          </a:solidFill>
-          <a:ln>
-            <a:noFill/>
-          </a:ln>
-          <a:effectLst/>
-        </p:spPr>
-        <p:style>
-          <a:lnRef idx="1">
-            <a:schemeClr val="accent1"/>
-          </a:lnRef>
-          <a:fillRef idx="3">
-            <a:schemeClr val="accent1"/>
-          </a:fillRef>
-          <a:effectRef idx="2">
-            <a:schemeClr val="accent1"/>
-          </a:effectRef>
-          <a:fontRef idx="minor">
-            <a:schemeClr val="lt1"/>
-          </a:fontRef>
-        </p:style>
-        <p:txBody>
-          <a:bodyPr rtlCol="0" anchor="ctr"/>
-          <a:lstStyle/>
-          <a:p>
-            <a:pPr algn="ctr"/>
-          </a:p>
-        </p:txBody>
-      </p:sp>
-      <p:sp>
-        <p:nvSpPr>
-          <p:cNvPr id="29" name="TextBox 28"/>
+              <a:rPr sz="1700" b="1" i="0">
+                <a:solidFill>
+                  <a:srgbClr val="18181B"/>
+                </a:solidFill>
+                <a:latin typeface="Calibri"/>
+              </a:rPr>
+              <a:t>~24M+</a:t>
+            </a:r>
+          </a:p>
+        </p:txBody>
+      </p:sp>
+      <p:sp>
+        <p:nvSpPr>
+          <p:cNvPr id="33" name="TextBox 32"/>
           <p:cNvSpPr txBox="1"/>
           <p:nvPr/>
         </p:nvSpPr>
         <p:spPr>
           <a:xfrm>
-            <a:off x="7516368" y="5522976"/>
-            <a:ext cx="4007815" cy="365760"/>
+            <a:off x="7516368" y="2999232"/>
+            <a:ext cx="4007815" cy="274320"/>
           </a:xfrm>
           <a:prstGeom prst="rect">
             <a:avLst/>
@@ -5405,27 +5589,119 @@
               </a:spcAft>
             </a:pPr>
             <a:r>
-              <a:rPr sz="1700" b="1" i="0">
-                <a:solidFill>
-                  <a:srgbClr val="18181B"/>
-                </a:solidFill>
-                <a:latin typeface="Calibri"/>
-              </a:rPr>
-              <a:t>None (S.9 gap)</a:t>
-            </a:r>
-          </a:p>
-        </p:txBody>
-      </p:sp>
-      <p:sp>
-        <p:nvSpPr>
-          <p:cNvPr id="30" name="TextBox 29"/>
+              <a:rPr sz="1000" b="0" i="0">
+                <a:solidFill>
+                  <a:srgbClr val="52525B"/>
+                </a:solidFill>
+                <a:latin typeface="Calibri"/>
+              </a:rPr>
+              <a:t>Monthly active users</a:t>
+            </a:r>
+          </a:p>
+        </p:txBody>
+      </p:sp>
+      <p:sp>
+        <p:nvSpPr>
+          <p:cNvPr id="34" name="Rounded Rectangle 33"/>
+          <p:cNvSpPr/>
+          <p:nvPr/>
+        </p:nvSpPr>
+        <p:spPr>
+          <a:xfrm>
+            <a:off x="7315200" y="3465576"/>
+            <a:ext cx="4373575" cy="841248"/>
+          </a:xfrm>
+          <a:prstGeom prst="roundRect">
+            <a:avLst>
+              <a:gd name="adj" fmla="val 8000"/>
+            </a:avLst>
+          </a:prstGeom>
+          <a:solidFill>
+            <a:srgbClr val="FAFAFA"/>
+          </a:solidFill>
+          <a:ln w="12700">
+            <a:solidFill>
+              <a:srgbClr val="E4E4E7"/>
+            </a:solidFill>
+          </a:ln>
+          <a:effectLst/>
+        </p:spPr>
+        <p:style>
+          <a:lnRef idx="1">
+            <a:schemeClr val="accent1"/>
+          </a:lnRef>
+          <a:fillRef idx="3">
+            <a:schemeClr val="accent1"/>
+          </a:fillRef>
+          <a:effectRef idx="2">
+            <a:schemeClr val="accent1"/>
+          </a:effectRef>
+          <a:fontRef idx="minor">
+            <a:schemeClr val="lt1"/>
+          </a:fontRef>
+        </p:style>
+        <p:txBody>
+          <a:bodyPr rtlCol="0" anchor="ctr"/>
+          <a:lstStyle/>
+          <a:p>
+            <a:pPr algn="ctr"/>
+          </a:p>
+        </p:txBody>
+      </p:sp>
+      <p:sp>
+        <p:nvSpPr>
+          <p:cNvPr id="35" name="Rectangle 34"/>
+          <p:cNvSpPr/>
+          <p:nvPr/>
+        </p:nvSpPr>
+        <p:spPr>
+          <a:xfrm>
+            <a:off x="7315200" y="3575304"/>
+            <a:ext cx="54864" cy="621792"/>
+          </a:xfrm>
+          <a:prstGeom prst="rect">
+            <a:avLst/>
+          </a:prstGeom>
+          <a:solidFill>
+            <a:srgbClr val="FC8019"/>
+          </a:solidFill>
+          <a:ln>
+            <a:noFill/>
+          </a:ln>
+          <a:effectLst/>
+        </p:spPr>
+        <p:style>
+          <a:lnRef idx="1">
+            <a:schemeClr val="accent1"/>
+          </a:lnRef>
+          <a:fillRef idx="3">
+            <a:schemeClr val="accent1"/>
+          </a:fillRef>
+          <a:effectRef idx="2">
+            <a:schemeClr val="accent1"/>
+          </a:effectRef>
+          <a:fontRef idx="minor">
+            <a:schemeClr val="lt1"/>
+          </a:fontRef>
+        </p:style>
+        <p:txBody>
+          <a:bodyPr rtlCol="0" anchor="ctr"/>
+          <a:lstStyle/>
+          <a:p>
+            <a:pPr algn="ctr"/>
+          </a:p>
+        </p:txBody>
+      </p:sp>
+      <p:sp>
+        <p:nvSpPr>
+          <p:cNvPr id="36" name="TextBox 35"/>
           <p:cNvSpPr txBox="1"/>
           <p:nvPr/>
         </p:nvSpPr>
         <p:spPr>
           <a:xfrm>
-            <a:off x="7516368" y="5907024"/>
-            <a:ext cx="4007815" cy="274320"/>
+            <a:off x="7516368" y="3584448"/>
+            <a:ext cx="4007815" cy="365760"/>
           </a:xfrm>
           <a:prstGeom prst="rect">
             <a:avLst/>
@@ -5450,63 +5726,27 @@
               </a:spcAft>
             </a:pPr>
             <a:r>
-              <a:rPr sz="1000" b="0" i="0">
-                <a:solidFill>
-                  <a:srgbClr val="52525B"/>
-                </a:solidFill>
-                <a:latin typeface="Calibri"/>
-              </a:rPr>
-              <a:t>Children's-data gate today</a:t>
-            </a:r>
-          </a:p>
-        </p:txBody>
-      </p:sp>
-      <p:cxnSp>
-        <p:nvCxnSpPr>
-          <p:cNvPr id="31" name="Connector 30"/>
-          <p:cNvCxnSpPr/>
-          <p:nvPr/>
-        </p:nvCxnSpPr>
-        <p:spPr>
-          <a:xfrm>
-            <a:off x="502920" y="6473952"/>
-            <a:ext cx="11185855" cy="0"/>
-          </a:xfrm>
-          <a:prstGeom prst="bentConnector3">
-            <a:avLst/>
-          </a:prstGeom>
-          <a:ln w="12700">
-            <a:solidFill>
-              <a:srgbClr val="E4E4E7"/>
-            </a:solidFill>
-          </a:ln>
-          <a:effectLst/>
-        </p:spPr>
-        <p:style>
-          <a:lnRef idx="2">
-            <a:schemeClr val="accent1"/>
-          </a:lnRef>
-          <a:fillRef idx="0">
-            <a:schemeClr val="accent1"/>
-          </a:fillRef>
-          <a:effectRef idx="1">
-            <a:schemeClr val="accent1"/>
-          </a:effectRef>
-          <a:fontRef idx="minor">
-            <a:schemeClr val="tx1"/>
-          </a:fontRef>
-        </p:style>
-      </p:cxnSp>
-      <p:sp>
-        <p:nvSpPr>
-          <p:cNvPr id="32" name="TextBox 31"/>
+              <a:rPr sz="1700" b="1" i="0">
+                <a:solidFill>
+                  <a:srgbClr val="18181B"/>
+                </a:solidFill>
+                <a:latin typeface="Calibri"/>
+              </a:rPr>
+              <a:t>₹250 cr</a:t>
+            </a:r>
+          </a:p>
+        </p:txBody>
+      </p:sp>
+      <p:sp>
+        <p:nvSpPr>
+          <p:cNvPr id="37" name="TextBox 36"/>
           <p:cNvSpPr txBox="1"/>
           <p:nvPr/>
         </p:nvSpPr>
         <p:spPr>
           <a:xfrm>
-            <a:off x="502920" y="6528816"/>
-            <a:ext cx="6400800" cy="274320"/>
+            <a:off x="7516368" y="3968496"/>
+            <a:ext cx="4007815" cy="274320"/>
           </a:xfrm>
           <a:prstGeom prst="rect">
             <a:avLst/>
@@ -5531,6 +5771,451 @@
               </a:spcAft>
             </a:pPr>
             <a:r>
+              <a:rPr sz="1000" b="0" i="0">
+                <a:solidFill>
+                  <a:srgbClr val="52525B"/>
+                </a:solidFill>
+                <a:latin typeface="Calibri"/>
+              </a:rPr>
+              <a:t>Max DPDP penalty</a:t>
+            </a:r>
+          </a:p>
+        </p:txBody>
+      </p:sp>
+      <p:sp>
+        <p:nvSpPr>
+          <p:cNvPr id="38" name="Rounded Rectangle 37"/>
+          <p:cNvSpPr/>
+          <p:nvPr/>
+        </p:nvSpPr>
+        <p:spPr>
+          <a:xfrm>
+            <a:off x="7315200" y="4434840"/>
+            <a:ext cx="4373575" cy="841248"/>
+          </a:xfrm>
+          <a:prstGeom prst="roundRect">
+            <a:avLst>
+              <a:gd name="adj" fmla="val 8000"/>
+            </a:avLst>
+          </a:prstGeom>
+          <a:solidFill>
+            <a:srgbClr val="FAFAFA"/>
+          </a:solidFill>
+          <a:ln w="12700">
+            <a:solidFill>
+              <a:srgbClr val="E4E4E7"/>
+            </a:solidFill>
+          </a:ln>
+          <a:effectLst/>
+        </p:spPr>
+        <p:style>
+          <a:lnRef idx="1">
+            <a:schemeClr val="accent1"/>
+          </a:lnRef>
+          <a:fillRef idx="3">
+            <a:schemeClr val="accent1"/>
+          </a:fillRef>
+          <a:effectRef idx="2">
+            <a:schemeClr val="accent1"/>
+          </a:effectRef>
+          <a:fontRef idx="minor">
+            <a:schemeClr val="lt1"/>
+          </a:fontRef>
+        </p:style>
+        <p:txBody>
+          <a:bodyPr rtlCol="0" anchor="ctr"/>
+          <a:lstStyle/>
+          <a:p>
+            <a:pPr algn="ctr"/>
+          </a:p>
+        </p:txBody>
+      </p:sp>
+      <p:sp>
+        <p:nvSpPr>
+          <p:cNvPr id="39" name="Rectangle 38"/>
+          <p:cNvSpPr/>
+          <p:nvPr/>
+        </p:nvSpPr>
+        <p:spPr>
+          <a:xfrm>
+            <a:off x="7315200" y="4544568"/>
+            <a:ext cx="54864" cy="621792"/>
+          </a:xfrm>
+          <a:prstGeom prst="rect">
+            <a:avLst/>
+          </a:prstGeom>
+          <a:solidFill>
+            <a:srgbClr val="FC8019"/>
+          </a:solidFill>
+          <a:ln>
+            <a:noFill/>
+          </a:ln>
+          <a:effectLst/>
+        </p:spPr>
+        <p:style>
+          <a:lnRef idx="1">
+            <a:schemeClr val="accent1"/>
+          </a:lnRef>
+          <a:fillRef idx="3">
+            <a:schemeClr val="accent1"/>
+          </a:fillRef>
+          <a:effectRef idx="2">
+            <a:schemeClr val="accent1"/>
+          </a:effectRef>
+          <a:fontRef idx="minor">
+            <a:schemeClr val="lt1"/>
+          </a:fontRef>
+        </p:style>
+        <p:txBody>
+          <a:bodyPr rtlCol="0" anchor="ctr"/>
+          <a:lstStyle/>
+          <a:p>
+            <a:pPr algn="ctr"/>
+          </a:p>
+        </p:txBody>
+      </p:sp>
+      <p:sp>
+        <p:nvSpPr>
+          <p:cNvPr id="40" name="TextBox 39"/>
+          <p:cNvSpPr txBox="1"/>
+          <p:nvPr/>
+        </p:nvSpPr>
+        <p:spPr>
+          <a:xfrm>
+            <a:off x="7516368" y="4553712"/>
+            <a:ext cx="4007815" cy="365760"/>
+          </a:xfrm>
+          <a:prstGeom prst="rect">
+            <a:avLst/>
+          </a:prstGeom>
+          <a:noFill/>
+        </p:spPr>
+        <p:txBody>
+          <a:bodyPr wrap="square" anchor="t" lIns="0" rIns="0" tIns="0" bIns="0">
+            <a:spAutoFit/>
+          </a:bodyPr>
+          <a:lstStyle/>
+          <a:p>
+            <a:pPr algn="l">
+              <a:lnSpc>
+                <a:spcPct val="105000"/>
+              </a:lnSpc>
+              <a:spcBef>
+                <a:spcPts val="0"/>
+              </a:spcBef>
+              <a:spcAft>
+                <a:spcPts val="200"/>
+              </a:spcAft>
+            </a:pPr>
+            <a:r>
+              <a:rPr sz="1700" b="1" i="0">
+                <a:solidFill>
+                  <a:srgbClr val="18181B"/>
+                </a:solidFill>
+                <a:latin typeface="Calibri"/>
+              </a:rPr>
+              <a:t>~68% of digital natives</a:t>
+            </a:r>
+          </a:p>
+        </p:txBody>
+      </p:sp>
+      <p:sp>
+        <p:nvSpPr>
+          <p:cNvPr id="41" name="TextBox 40"/>
+          <p:cNvSpPr txBox="1"/>
+          <p:nvPr/>
+        </p:nvSpPr>
+        <p:spPr>
+          <a:xfrm>
+            <a:off x="7516368" y="4937760"/>
+            <a:ext cx="4007815" cy="274320"/>
+          </a:xfrm>
+          <a:prstGeom prst="rect">
+            <a:avLst/>
+          </a:prstGeom>
+          <a:noFill/>
+        </p:spPr>
+        <p:txBody>
+          <a:bodyPr wrap="square" anchor="t" lIns="0" rIns="0" tIns="0" bIns="0">
+            <a:spAutoFit/>
+          </a:bodyPr>
+          <a:lstStyle/>
+          <a:p>
+            <a:pPr algn="l">
+              <a:lnSpc>
+                <a:spcPct val="105000"/>
+              </a:lnSpc>
+              <a:spcBef>
+                <a:spcPts val="0"/>
+              </a:spcBef>
+              <a:spcAft>
+                <a:spcPts val="200"/>
+              </a:spcAft>
+            </a:pPr>
+            <a:r>
+              <a:rPr sz="1000" b="0" i="0">
+                <a:solidFill>
+                  <a:srgbClr val="52525B"/>
+                </a:solidFill>
+                <a:latin typeface="Calibri"/>
+              </a:rPr>
+              <a:t>Value data transparency</a:t>
+            </a:r>
+          </a:p>
+        </p:txBody>
+      </p:sp>
+      <p:sp>
+        <p:nvSpPr>
+          <p:cNvPr id="42" name="Rounded Rectangle 41"/>
+          <p:cNvSpPr/>
+          <p:nvPr/>
+        </p:nvSpPr>
+        <p:spPr>
+          <a:xfrm>
+            <a:off x="7315200" y="5404104"/>
+            <a:ext cx="4373575" cy="841248"/>
+          </a:xfrm>
+          <a:prstGeom prst="roundRect">
+            <a:avLst>
+              <a:gd name="adj" fmla="val 8000"/>
+            </a:avLst>
+          </a:prstGeom>
+          <a:solidFill>
+            <a:srgbClr val="FAFAFA"/>
+          </a:solidFill>
+          <a:ln w="12700">
+            <a:solidFill>
+              <a:srgbClr val="E4E4E7"/>
+            </a:solidFill>
+          </a:ln>
+          <a:effectLst/>
+        </p:spPr>
+        <p:style>
+          <a:lnRef idx="1">
+            <a:schemeClr val="accent1"/>
+          </a:lnRef>
+          <a:fillRef idx="3">
+            <a:schemeClr val="accent1"/>
+          </a:fillRef>
+          <a:effectRef idx="2">
+            <a:schemeClr val="accent1"/>
+          </a:effectRef>
+          <a:fontRef idx="minor">
+            <a:schemeClr val="lt1"/>
+          </a:fontRef>
+        </p:style>
+        <p:txBody>
+          <a:bodyPr rtlCol="0" anchor="ctr"/>
+          <a:lstStyle/>
+          <a:p>
+            <a:pPr algn="ctr"/>
+          </a:p>
+        </p:txBody>
+      </p:sp>
+      <p:sp>
+        <p:nvSpPr>
+          <p:cNvPr id="43" name="Rectangle 42"/>
+          <p:cNvSpPr/>
+          <p:nvPr/>
+        </p:nvSpPr>
+        <p:spPr>
+          <a:xfrm>
+            <a:off x="7315200" y="5513832"/>
+            <a:ext cx="54864" cy="621792"/>
+          </a:xfrm>
+          <a:prstGeom prst="rect">
+            <a:avLst/>
+          </a:prstGeom>
+          <a:solidFill>
+            <a:srgbClr val="FC8019"/>
+          </a:solidFill>
+          <a:ln>
+            <a:noFill/>
+          </a:ln>
+          <a:effectLst/>
+        </p:spPr>
+        <p:style>
+          <a:lnRef idx="1">
+            <a:schemeClr val="accent1"/>
+          </a:lnRef>
+          <a:fillRef idx="3">
+            <a:schemeClr val="accent1"/>
+          </a:fillRef>
+          <a:effectRef idx="2">
+            <a:schemeClr val="accent1"/>
+          </a:effectRef>
+          <a:fontRef idx="minor">
+            <a:schemeClr val="lt1"/>
+          </a:fontRef>
+        </p:style>
+        <p:txBody>
+          <a:bodyPr rtlCol="0" anchor="ctr"/>
+          <a:lstStyle/>
+          <a:p>
+            <a:pPr algn="ctr"/>
+          </a:p>
+        </p:txBody>
+      </p:sp>
+      <p:sp>
+        <p:nvSpPr>
+          <p:cNvPr id="44" name="TextBox 43"/>
+          <p:cNvSpPr txBox="1"/>
+          <p:nvPr/>
+        </p:nvSpPr>
+        <p:spPr>
+          <a:xfrm>
+            <a:off x="7516368" y="5522976"/>
+            <a:ext cx="4007815" cy="365760"/>
+          </a:xfrm>
+          <a:prstGeom prst="rect">
+            <a:avLst/>
+          </a:prstGeom>
+          <a:noFill/>
+        </p:spPr>
+        <p:txBody>
+          <a:bodyPr wrap="square" anchor="t" lIns="0" rIns="0" tIns="0" bIns="0">
+            <a:spAutoFit/>
+          </a:bodyPr>
+          <a:lstStyle/>
+          <a:p>
+            <a:pPr algn="l">
+              <a:lnSpc>
+                <a:spcPct val="105000"/>
+              </a:lnSpc>
+              <a:spcBef>
+                <a:spcPts val="0"/>
+              </a:spcBef>
+              <a:spcAft>
+                <a:spcPts val="200"/>
+              </a:spcAft>
+            </a:pPr>
+            <a:r>
+              <a:rPr sz="1700" b="1" i="0">
+                <a:solidFill>
+                  <a:srgbClr val="18181B"/>
+                </a:solidFill>
+                <a:latin typeface="Calibri"/>
+              </a:rPr>
+              <a:t>None (S.9 gap)</a:t>
+            </a:r>
+          </a:p>
+        </p:txBody>
+      </p:sp>
+      <p:sp>
+        <p:nvSpPr>
+          <p:cNvPr id="45" name="TextBox 44"/>
+          <p:cNvSpPr txBox="1"/>
+          <p:nvPr/>
+        </p:nvSpPr>
+        <p:spPr>
+          <a:xfrm>
+            <a:off x="7516368" y="5907024"/>
+            <a:ext cx="4007815" cy="274320"/>
+          </a:xfrm>
+          <a:prstGeom prst="rect">
+            <a:avLst/>
+          </a:prstGeom>
+          <a:noFill/>
+        </p:spPr>
+        <p:txBody>
+          <a:bodyPr wrap="square" anchor="t" lIns="0" rIns="0" tIns="0" bIns="0">
+            <a:spAutoFit/>
+          </a:bodyPr>
+          <a:lstStyle/>
+          <a:p>
+            <a:pPr algn="l">
+              <a:lnSpc>
+                <a:spcPct val="105000"/>
+              </a:lnSpc>
+              <a:spcBef>
+                <a:spcPts val="0"/>
+              </a:spcBef>
+              <a:spcAft>
+                <a:spcPts val="200"/>
+              </a:spcAft>
+            </a:pPr>
+            <a:r>
+              <a:rPr sz="1000" b="0" i="0">
+                <a:solidFill>
+                  <a:srgbClr val="52525B"/>
+                </a:solidFill>
+                <a:latin typeface="Calibri"/>
+              </a:rPr>
+              <a:t>Children's-data gate today</a:t>
+            </a:r>
+          </a:p>
+        </p:txBody>
+      </p:sp>
+      <p:cxnSp>
+        <p:nvCxnSpPr>
+          <p:cNvPr id="46" name="Connector 45"/>
+          <p:cNvCxnSpPr/>
+          <p:nvPr/>
+        </p:nvCxnSpPr>
+        <p:spPr>
+          <a:xfrm>
+            <a:off x="502920" y="6473952"/>
+            <a:ext cx="11185855" cy="0"/>
+          </a:xfrm>
+          <a:prstGeom prst="bentConnector3">
+            <a:avLst/>
+          </a:prstGeom>
+          <a:ln w="12700">
+            <a:solidFill>
+              <a:srgbClr val="E4E4E7"/>
+            </a:solidFill>
+          </a:ln>
+          <a:effectLst/>
+        </p:spPr>
+        <p:style>
+          <a:lnRef idx="2">
+            <a:schemeClr val="accent1"/>
+          </a:lnRef>
+          <a:fillRef idx="0">
+            <a:schemeClr val="accent1"/>
+          </a:fillRef>
+          <a:effectRef idx="1">
+            <a:schemeClr val="accent1"/>
+          </a:effectRef>
+          <a:fontRef idx="minor">
+            <a:schemeClr val="tx1"/>
+          </a:fontRef>
+        </p:style>
+      </p:cxnSp>
+      <p:sp>
+        <p:nvSpPr>
+          <p:cNvPr id="47" name="TextBox 46"/>
+          <p:cNvSpPr txBox="1"/>
+          <p:nvPr/>
+        </p:nvSpPr>
+        <p:spPr>
+          <a:xfrm>
+            <a:off x="502920" y="6528816"/>
+            <a:ext cx="6400800" cy="274320"/>
+          </a:xfrm>
+          <a:prstGeom prst="rect">
+            <a:avLst/>
+          </a:prstGeom>
+          <a:noFill/>
+        </p:spPr>
+        <p:txBody>
+          <a:bodyPr wrap="square" anchor="t" lIns="0" rIns="0" tIns="0" bIns="0">
+            <a:spAutoFit/>
+          </a:bodyPr>
+          <a:lstStyle/>
+          <a:p>
+            <a:pPr algn="l">
+              <a:lnSpc>
+                <a:spcPct val="105000"/>
+              </a:lnSpc>
+              <a:spcBef>
+                <a:spcPts val="0"/>
+              </a:spcBef>
+              <a:spcAft>
+                <a:spcPts val="200"/>
+              </a:spcAft>
+            </a:pPr>
+            <a:r>
               <a:rPr sz="900" b="0" i="0">
                 <a:solidFill>
                   <a:srgbClr val="52525B"/>
@@ -5544,7 +6229,7 @@
       </p:sp>
       <p:sp>
         <p:nvSpPr>
-          <p:cNvPr id="33" name="TextBox 32"/>
+          <p:cNvPr id="48" name="TextBox 47"/>
           <p:cNvSpPr txBox="1"/>
           <p:nvPr/>
         </p:nvSpPr>
@@ -5598,7 +6283,7 @@
       </p:sp>
       <p:sp>
         <p:nvSpPr>
-          <p:cNvPr id="34" name="Rectangle 33"/>
+          <p:cNvPr id="49" name="Rectangle 48"/>
           <p:cNvSpPr/>
           <p:nvPr/>
         </p:nvSpPr>
@@ -21512,7 +22197,7 @@
         <p:spPr>
           <a:xfrm>
             <a:off x="8229600" y="2414016"/>
-            <a:ext cx="3459175" cy="985265"/>
+            <a:ext cx="3459175" cy="916686"/>
           </a:xfrm>
           <a:prstGeom prst="roundRect">
             <a:avLst>
@@ -21604,8 +22289,8 @@
         </p:nvSpPr>
         <p:spPr>
           <a:xfrm>
-            <a:off x="8357616" y="2724912"/>
-            <a:ext cx="3221431" cy="619505"/>
+            <a:off x="8357616" y="2706624"/>
+            <a:ext cx="3221431" cy="550925"/>
           </a:xfrm>
           <a:prstGeom prst="rect">
             <a:avLst/>
@@ -21649,8 +22334,8 @@
         </p:nvSpPr>
         <p:spPr>
           <a:xfrm>
-            <a:off x="8229600" y="3490722"/>
-            <a:ext cx="3459175" cy="985265"/>
+            <a:off x="8229600" y="3422142"/>
+            <a:ext cx="3459175" cy="916686"/>
           </a:xfrm>
           <a:prstGeom prst="roundRect">
             <a:avLst>
@@ -21697,7 +22382,7 @@
         </p:nvSpPr>
         <p:spPr>
           <a:xfrm>
-            <a:off x="8357616" y="3563874"/>
+            <a:off x="8357616" y="3495294"/>
             <a:ext cx="3221431" cy="274320"/>
           </a:xfrm>
           <a:prstGeom prst="rect">
@@ -21742,8 +22427,8 @@
         </p:nvSpPr>
         <p:spPr>
           <a:xfrm>
-            <a:off x="8357616" y="3801618"/>
-            <a:ext cx="3221431" cy="619505"/>
+            <a:off x="8357616" y="3714750"/>
+            <a:ext cx="3221431" cy="550925"/>
           </a:xfrm>
           <a:prstGeom prst="rect">
             <a:avLst/>
@@ -21787,8 +22472,8 @@
         </p:nvSpPr>
         <p:spPr>
           <a:xfrm>
-            <a:off x="8229600" y="4567428"/>
-            <a:ext cx="3459175" cy="985265"/>
+            <a:off x="8229600" y="4430268"/>
+            <a:ext cx="3459175" cy="916686"/>
           </a:xfrm>
           <a:prstGeom prst="roundRect">
             <a:avLst>
@@ -21835,7 +22520,7 @@
         </p:nvSpPr>
         <p:spPr>
           <a:xfrm>
-            <a:off x="8357616" y="4640580"/>
+            <a:off x="8357616" y="4503420"/>
             <a:ext cx="3221431" cy="274320"/>
           </a:xfrm>
           <a:prstGeom prst="rect">
@@ -21880,8 +22565,8 @@
         </p:nvSpPr>
         <p:spPr>
           <a:xfrm>
-            <a:off x="8357616" y="4878324"/>
-            <a:ext cx="3221431" cy="619505"/>
+            <a:off x="8357616" y="4722876"/>
+            <a:ext cx="3221431" cy="550925"/>
           </a:xfrm>
           <a:prstGeom prst="rect">
             <a:avLst/>
@@ -21925,8 +22610,8 @@
         </p:nvSpPr>
         <p:spPr>
           <a:xfrm>
-            <a:off x="8229600" y="5644133"/>
-            <a:ext cx="3459175" cy="985265"/>
+            <a:off x="8229600" y="5438394"/>
+            <a:ext cx="3459175" cy="916686"/>
           </a:xfrm>
           <a:prstGeom prst="roundRect">
             <a:avLst>
@@ -21973,7 +22658,7 @@
         </p:nvSpPr>
         <p:spPr>
           <a:xfrm>
-            <a:off x="8357616" y="5717286"/>
+            <a:off x="8357616" y="5511546"/>
             <a:ext cx="3221431" cy="274320"/>
           </a:xfrm>
           <a:prstGeom prst="rect">
@@ -22018,8 +22703,8 @@
         </p:nvSpPr>
         <p:spPr>
           <a:xfrm>
-            <a:off x="8357616" y="5955029"/>
-            <a:ext cx="3221431" cy="619505"/>
+            <a:off x="8357616" y="5731002"/>
+            <a:ext cx="3221431" cy="550925"/>
           </a:xfrm>
           <a:prstGeom prst="rect">
             <a:avLst/>
